--- a/decks/englang-p2/englang-p2_ch2_q1-q2-infer.pptx
+++ b/decks/englang-p2/englang-p2_ch2_q1-q2-infer.pptx
@@ -130,29 +130,29 @@
   <p:extLst>
     <p:ext uri="{521415D9-36F7-43E2-AB2F-B90AF26B5E84}">
       <p14:sectionLst xmlns:p14="http://schemas.microsoft.com/office/powerpoint/2010/main">
-        <p14:section name="Opening" id="{745b9265-5640-15c9-1679-c4e083d1b3b6}">
+        <p14:section name="Opening" id="{a3899a24-81a4-1b8e-96af-7fd2960e314e}">
           <p14:sldIdLst>
             <p14:sldId id="256"/>
           </p14:sldIdLst>
         </p14:section>
-        <p14:section name="Gate" id="{7d93b776-62f6-8f02-b8cd-5631a6185fab}">
+        <p14:section name="Gate" id="{574aa145-401c-e198-08b0-0791d752f669}">
           <p14:sldIdLst>
             <p14:sldId id="257"/>
             <p14:sldId id="258"/>
           </p14:sldIdLst>
         </p14:section>
-        <p14:section name="Pre-teach" id="{02ea75a0-3b73-f89c-fe8e-2d9fe4a85f25}">
+        <p14:section name="Pre-teach" id="{e7912901-51b4-23bb-95e6-65b4d58641b6}">
           <p14:sldIdLst>
             <p14:sldId id="259"/>
           </p14:sldIdLst>
         </p14:section>
-        <p14:section name="Read-along" id="{2d78cb40-eaf6-fb3b-8331-16a59885aa52}">
+        <p14:section name="Read-along" id="{4ef838d5-5882-81f2-f0eb-68676af7651a}">
           <p14:sldIdLst>
             <p14:sldId id="260"/>
             <p14:sldId id="261"/>
           </p14:sldIdLst>
         </p14:section>
-        <p14:section name="Teach" id="{b9466f13-7c21-ea8b-23e5-c614919966fd}">
+        <p14:section name="Teach" id="{bd69a93d-69e3-03b8-a1f2-58fa8821bdc5}">
           <p14:sldIdLst>
             <p14:sldId id="262"/>
             <p14:sldId id="263"/>
@@ -166,7 +166,7 @@
             <p14:sldId id="271"/>
           </p14:sldIdLst>
         </p14:section>
-        <p14:section name="Routes" id="{5e7864dc-c846-3737-3bc9-f02a1e00506a}">
+        <p14:section name="Routes" id="{7502921a-6deb-29cf-2cbc-8cd6bfa442e4}">
           <p14:sldIdLst>
             <p14:sldId id="272"/>
             <p14:sldId id="273"/>
@@ -174,12 +174,12 @@
             <p14:sldId id="275"/>
           </p14:sldIdLst>
         </p14:section>
-        <p14:section name="Close" id="{1199326a-51aa-6ee3-df30-171193a12f1b}">
+        <p14:section name="Close" id="{0bea3204-2fd4-59d7-8a8c-92e1a79c3691}">
           <p14:sldIdLst>
             <p14:sldId id="276"/>
           </p14:sldIdLst>
         </p14:section>
-        <p14:section name="Answers" id="{117360b6-be81-340e-a8b2-484a088fe56d}">
+        <p14:section name="Answers" id="{f4059005-db2a-aeb8-85f2-0406308e5811}">
           <p14:sldIdLst>
             <p14:sldId id="277"/>
             <p14:sldId id="278"/>
@@ -1614,7 +1614,7 @@
             <a:r>
               <a:rPr lang="en-US" dirty="0"/>
               <a:t>Do now — retrieval. Silent, no notes, no help: recall comes before any support. Give about four minutes.
-1. How many statements are true in Question 1, and how do you show them?  →  B   Four; shade the box beside each one
+1. How many statements are true in Question 1, and how do you show them?  →  C   Four; shade the box beside each one
 2. In Question 2 you ___ what the sources suggest, rather than repeating what they say.  →  infer
 3. How many marks is Question 2 worth?  →  B   8
 Circulate: who gets 3/3 (Stretch route), 2/3 (Core), 0–1 (Support)? Use this to route pupils later in the lesson.</a:t>
@@ -1801,7 +1801,7 @@
               <a:rPr lang="en-US" dirty="0"/>
               <a:t>Exit ticket — individual, silent, on a slip or mini-whiteboard. Recall before help: no notes, no lanes, no hints. Collect before pupils leave.
 Question: How many statements are true in Question 1, and how do you show them?
-Answer: A   Four; shade the box beside each one. Four of the eight statements are true. You shade the box beside each one.
+Answer: B   Four; shade the box beside each one. Four of the eight statements are true. You shade the box beside each one.
 Source of this question: gate item 1 re-asked (options rotated) — this chapter has no third quick-check module.
 The ebook also holds task 3, "Question 2 practice paragraphs", for homework or the next lesson's do now.
 Sort the slips: correct → ready to move on; incorrect → start next lesson in the pre-teach group, with the read-along and the Support lane. Same destination next time.</a:t>
@@ -1893,7 +1893,7 @@
             <a:r>
               <a:rPr lang="en-US" dirty="0"/>
               <a:t>Answers — task 1: Question 1 practice: the true statement. Reveal the answer; pupils mark their own work in a different colour, then read the "why" together. Same destination for every lane, so one answer serves the whole class.
-Answer: A   The family has driven for two hours to reach the park.
+Answer: C   The family has driven for two hours to reach the park.
 Why: “We have driven for two hours to be here.” The daughter is six, the family arrives at nine o’clock, and the meerkats come first.
 Ask a Support pupil to explain one step, and a Stretch pupil to share their extension.</a:t>
             </a:r>
@@ -2075,7 +2075,7 @@
             <a:r>
               <a:rPr lang="en-US" dirty="0"/>
               <a:t>Answers — exit ticket: Exit ticket. Reveal the answer; pupils mark their own work in a different colour, then read the "why" together. Same destination for every lane, so one answer serves the whole class.
-Answer: A   Four; shade the box beside each one
+Answer: B   Four; shade the box beside each one
 Why: Four of the eight statements are true. You shade the box beside each one.
 Ask a Support pupil to explain one step, and a Stretch pupil to share their extension.</a:t>
             </a:r>
@@ -2166,7 +2166,7 @@
             <a:r>
               <a:rPr lang="en-US" dirty="0"/>
               <a:t>Answers — pupils mark their own in a different colour, then hands up for 3/3, 2/3, 1/3.
-1. B   Four; shade the box beside each one. Four of the eight statements are true. You shade the box beside each one.
+1. C   Four; shade the box beside each one. Four of the eight statements are true. You shade the box beside each one.
 2. infer. Question 2 always uses the word ‘infer’: say what the details suggest.
 3. B   8. Question 2 is worth 8 marks and takes about 10 minutes.
 Say the route each score points to: 3/3 Stretch, 2/3 Core, 0–1 Support. Pupils may choose to move up.</a:t>
@@ -7472,7 +7472,7 @@
                 <a:ea typeface="Calibri" pitchFamily="34" charset="-122"/>
                 <a:cs typeface="Calibri" pitchFamily="34" charset="-120"/>
               </a:rPr>
-              <a:t>The family has driven for two hours to reach the park.</a:t>
+              <a:t>The writer’s daughter is nine years old.</a:t>
             </a:r>
             <a:endParaRPr lang="en-US" sz="2600" dirty="0"/>
           </a:p>
@@ -7509,7 +7509,7 @@
                 <a:ea typeface="Calibri" pitchFamily="34" charset="-122"/>
                 <a:cs typeface="Calibri" pitchFamily="34" charset="-120"/>
               </a:rPr>
-              <a:t>The writer’s daughter is nine years old.</a:t>
+              <a:t>The first enclosure they see is the tiger.</a:t>
             </a:r>
             <a:endParaRPr lang="en-US" sz="2600" dirty="0"/>
           </a:p>
@@ -7546,7 +7546,7 @@
                 <a:ea typeface="Calibri" pitchFamily="34" charset="-122"/>
                 <a:cs typeface="Calibri" pitchFamily="34" charset="-120"/>
               </a:rPr>
-              <a:t>The gates open at noon.</a:t>
+              <a:t>The family has driven for two hours to reach the park.</a:t>
             </a:r>
             <a:endParaRPr lang="en-US" sz="2600" dirty="0"/>
           </a:p>
@@ -7583,7 +7583,7 @@
                 <a:ea typeface="Calibri" pitchFamily="34" charset="-122"/>
                 <a:cs typeface="Calibri" pitchFamily="34" charset="-120"/>
               </a:rPr>
-              <a:t>The first enclosure they see is the tiger.</a:t>
+              <a:t>The gates open at noon.</a:t>
             </a:r>
             <a:endParaRPr lang="en-US" sz="2600" dirty="0"/>
           </a:p>
@@ -10283,7 +10283,7 @@
                 <a:ea typeface="Calibri" pitchFamily="34" charset="-122"/>
                 <a:cs typeface="Calibri" pitchFamily="34" charset="-120"/>
               </a:rPr>
-              <a:t>Two; tick them</a:t>
+              <a:t>One; circle it</a:t>
             </a:r>
             <a:endParaRPr lang="en-US" sz="2200" dirty="0"/>
           </a:p>
@@ -10320,7 +10320,7 @@
                 <a:ea typeface="Calibri" pitchFamily="34" charset="-122"/>
                 <a:cs typeface="Calibri" pitchFamily="34" charset="-120"/>
               </a:rPr>
-              <a:t>Four; shade the box beside each one</a:t>
+              <a:t>Eight; underline them</a:t>
             </a:r>
             <a:endParaRPr lang="en-US" sz="2200" dirty="0"/>
           </a:p>
@@ -10357,7 +10357,7 @@
                 <a:ea typeface="Calibri" pitchFamily="34" charset="-122"/>
                 <a:cs typeface="Calibri" pitchFamily="34" charset="-120"/>
               </a:rPr>
-              <a:t>Eight; underline them</a:t>
+              <a:t>Four; shade the box beside each one</a:t>
             </a:r>
             <a:endParaRPr lang="en-US" sz="2200" dirty="0"/>
           </a:p>
@@ -10394,7 +10394,7 @@
                 <a:ea typeface="Calibri" pitchFamily="34" charset="-122"/>
                 <a:cs typeface="Calibri" pitchFamily="34" charset="-120"/>
               </a:rPr>
-              <a:t>One; circle it</a:t>
+              <a:t>Two; tick them</a:t>
             </a:r>
             <a:endParaRPr lang="en-US" sz="2200" dirty="0"/>
           </a:p>
@@ -10796,7 +10796,7 @@
                 <a:ea typeface="Calibri" pitchFamily="34" charset="-122"/>
                 <a:cs typeface="Calibri" pitchFamily="34" charset="-120"/>
               </a:rPr>
-              <a:t>4</a:t>
+              <a:t>16</a:t>
             </a:r>
             <a:endParaRPr lang="en-US" sz="2400" dirty="0"/>
           </a:p>
@@ -10907,7 +10907,7 @@
                 <a:ea typeface="Calibri" pitchFamily="34" charset="-122"/>
                 <a:cs typeface="Calibri" pitchFamily="34" charset="-120"/>
               </a:rPr>
-              <a:t>16</a:t>
+              <a:t>4</a:t>
             </a:r>
             <a:endParaRPr lang="en-US" sz="2400" dirty="0"/>
           </a:p>
@@ -12274,7 +12274,7 @@
                 <a:ea typeface="Calibri" pitchFamily="34" charset="-122"/>
                 <a:cs typeface="Calibri" pitchFamily="34" charset="-120"/>
               </a:rPr>
-              <a:t>Four; shade the box beside each one</a:t>
+              <a:t>Eight; underline them</a:t>
             </a:r>
             <a:endParaRPr lang="en-US" sz="2400" dirty="0"/>
           </a:p>
@@ -12311,7 +12311,7 @@
                 <a:ea typeface="Calibri" pitchFamily="34" charset="-122"/>
                 <a:cs typeface="Calibri" pitchFamily="34" charset="-120"/>
               </a:rPr>
-              <a:t>Eight; underline them</a:t>
+              <a:t>Four; shade the box beside each one</a:t>
             </a:r>
             <a:endParaRPr lang="en-US" sz="2400" dirty="0"/>
           </a:p>
@@ -12348,7 +12348,7 @@
                 <a:ea typeface="Calibri" pitchFamily="34" charset="-122"/>
                 <a:cs typeface="Calibri" pitchFamily="34" charset="-120"/>
               </a:rPr>
-              <a:t>One; circle it</a:t>
+              <a:t>Two; tick them</a:t>
             </a:r>
             <a:endParaRPr lang="en-US" sz="2400" dirty="0"/>
           </a:p>
@@ -12385,7 +12385,7 @@
                 <a:ea typeface="Calibri" pitchFamily="34" charset="-122"/>
                 <a:cs typeface="Calibri" pitchFamily="34" charset="-120"/>
               </a:rPr>
-              <a:t>Two; tick them</a:t>
+              <a:t>One; circle it</a:t>
             </a:r>
             <a:endParaRPr lang="en-US" sz="2400" dirty="0"/>
           </a:p>
@@ -12790,7 +12790,7 @@
                 <a:ea typeface="Cambria" pitchFamily="34" charset="-122"/>
                 <a:cs typeface="Cambria" pitchFamily="34" charset="-120"/>
               </a:rPr>
-              <a:t>A   The family has driven for two hours to reach the park.</a:t>
+              <a:t>C   The family has driven for two hours to reach the park.</a:t>
             </a:r>
             <a:endParaRPr lang="en-US" sz="1800" dirty="0"/>
           </a:p>
@@ -13819,7 +13819,7 @@
                 <a:ea typeface="Cambria" pitchFamily="34" charset="-122"/>
                 <a:cs typeface="Cambria" pitchFamily="34" charset="-120"/>
               </a:rPr>
-              <a:t>A   Four; shade the box beside each one</a:t>
+              <a:t>B   Four; shade the box beside each one</a:t>
             </a:r>
             <a:endParaRPr lang="en-US" sz="1800" dirty="0"/>
           </a:p>
@@ -14340,7 +14340,7 @@
                 <a:ea typeface="Calibri" pitchFamily="34" charset="-122"/>
                 <a:cs typeface="Calibri" pitchFamily="34" charset="-120"/>
               </a:rPr>
-              <a:t>B   Four; shade the box beside each one</a:t>
+              <a:t>C   Four; shade the box beside each one</a:t>
             </a:r>
             <a:endParaRPr lang="en-US" sz="2200" dirty="0"/>
           </a:p>

--- a/decks/englang-p2/englang-p2_ch2_q1-q2-infer.pptx
+++ b/decks/englang-p2/englang-p2_ch2_q1-q2-infer.pptx
@@ -130,29 +130,29 @@
   <p:extLst>
     <p:ext uri="{521415D9-36F7-43E2-AB2F-B90AF26B5E84}">
       <p14:sectionLst xmlns:p14="http://schemas.microsoft.com/office/powerpoint/2010/main">
-        <p14:section name="Opening" id="{a3899a24-81a4-1b8e-96af-7fd2960e314e}">
+        <p14:section name="Opening" id="{d5c8eab2-b300-990f-ac6a-51f4431c1919}">
           <p14:sldIdLst>
             <p14:sldId id="256"/>
           </p14:sldIdLst>
         </p14:section>
-        <p14:section name="Gate" id="{574aa145-401c-e198-08b0-0791d752f669}">
+        <p14:section name="Gate" id="{375c0b7a-4ee5-13db-b090-6094d5b861d6}">
           <p14:sldIdLst>
             <p14:sldId id="257"/>
             <p14:sldId id="258"/>
           </p14:sldIdLst>
         </p14:section>
-        <p14:section name="Pre-teach" id="{e7912901-51b4-23bb-95e6-65b4d58641b6}">
+        <p14:section name="Pre-teach" id="{604186ff-566e-2458-f202-527a39dcf79d}">
           <p14:sldIdLst>
             <p14:sldId id="259"/>
           </p14:sldIdLst>
         </p14:section>
-        <p14:section name="Read-along" id="{4ef838d5-5882-81f2-f0eb-68676af7651a}">
+        <p14:section name="Read-along" id="{82c2b879-6a88-e2e8-4598-9415efedfab3}">
           <p14:sldIdLst>
             <p14:sldId id="260"/>
             <p14:sldId id="261"/>
           </p14:sldIdLst>
         </p14:section>
-        <p14:section name="Teach" id="{bd69a93d-69e3-03b8-a1f2-58fa8821bdc5}">
+        <p14:section name="Teach" id="{53fc5ba6-f2ee-7371-fc8d-869f9406f518}">
           <p14:sldIdLst>
             <p14:sldId id="262"/>
             <p14:sldId id="263"/>
@@ -166,7 +166,7 @@
             <p14:sldId id="271"/>
           </p14:sldIdLst>
         </p14:section>
-        <p14:section name="Routes" id="{7502921a-6deb-29cf-2cbc-8cd6bfa442e4}">
+        <p14:section name="Routes" id="{9b90aee0-e938-388c-23da-5a20e7501eb8}">
           <p14:sldIdLst>
             <p14:sldId id="272"/>
             <p14:sldId id="273"/>
@@ -174,12 +174,12 @@
             <p14:sldId id="275"/>
           </p14:sldIdLst>
         </p14:section>
-        <p14:section name="Close" id="{0bea3204-2fd4-59d7-8a8c-92e1a79c3691}">
+        <p14:section name="Close" id="{4db5c9fd-98ed-1c64-b0dd-613fe86794fc}">
           <p14:sldIdLst>
             <p14:sldId id="276"/>
           </p14:sldIdLst>
         </p14:section>
-        <p14:section name="Answers" id="{f4059005-db2a-aeb8-85f2-0406308e5811}">
+        <p14:section name="Answers" id="{93cb15ec-fc63-2722-c3ce-d47b75082ff8}">
           <p14:sldIdLst>
             <p14:sldId id="277"/>
             <p14:sldId id="278"/>
